--- a/src/j23_Encapsulation/OOP.pptx
+++ b/src/j23_Encapsulation/OOP.pptx
@@ -1,40 +1,40 @@
 
 <file path=ppt/presentation.xml><?xml version="1.0" encoding="utf-8"?>
-<p:presentation xmlns:a="http://schemas.openxmlformats.org/drawingml/2006/main" xmlns:r="http://schemas.openxmlformats.org/officeDocument/2006/relationships" xmlns:p="http://schemas.openxmlformats.org/presentationml/2006/main" saveSubsetFonts="1">
+<p:presentation xmlns:a="http://schemas.openxmlformats.org/drawingml/2006/main" xmlns:r="http://schemas.openxmlformats.org/officeDocument/2006/relationships" xmlns:p="http://schemas.openxmlformats.org/presentationml/2006/main">
   <p:sldMasterIdLst>
-    <p:sldMasterId id="2147483732" r:id="rId1"/>
+    <p:sldMasterId id="2147483648" r:id="rId1"/>
   </p:sldMasterIdLst>
   <p:notesMasterIdLst>
-    <p:notesMasterId r:id="rId29"/>
+    <p:notesMasterId r:id="rId4"/>
   </p:notesMasterIdLst>
   <p:sldIdLst>
-    <p:sldId id="256" r:id="rId2"/>
-    <p:sldId id="277" r:id="rId3"/>
-    <p:sldId id="263" r:id="rId4"/>
-    <p:sldId id="258" r:id="rId5"/>
-    <p:sldId id="279" r:id="rId6"/>
-    <p:sldId id="259" r:id="rId7"/>
-    <p:sldId id="266" r:id="rId8"/>
-    <p:sldId id="280" r:id="rId9"/>
-    <p:sldId id="260" r:id="rId10"/>
-    <p:sldId id="267" r:id="rId11"/>
-    <p:sldId id="268" r:id="rId12"/>
-    <p:sldId id="281" r:id="rId13"/>
-    <p:sldId id="282" r:id="rId14"/>
-    <p:sldId id="261" r:id="rId15"/>
-    <p:sldId id="262" r:id="rId16"/>
-    <p:sldId id="283" r:id="rId17"/>
-    <p:sldId id="270" r:id="rId18"/>
-    <p:sldId id="284" r:id="rId19"/>
-    <p:sldId id="269" r:id="rId20"/>
-    <p:sldId id="271" r:id="rId21"/>
-    <p:sldId id="272" r:id="rId22"/>
-    <p:sldId id="264" r:id="rId23"/>
-    <p:sldId id="265" r:id="rId24"/>
-    <p:sldId id="273" r:id="rId25"/>
-    <p:sldId id="274" r:id="rId26"/>
-    <p:sldId id="275" r:id="rId27"/>
-    <p:sldId id="276" r:id="rId28"/>
+    <p:sldId id="256" r:id="rId3"/>
+    <p:sldId id="277" r:id="rId5"/>
+    <p:sldId id="263" r:id="rId6"/>
+    <p:sldId id="258" r:id="rId7"/>
+    <p:sldId id="279" r:id="rId8"/>
+    <p:sldId id="259" r:id="rId9"/>
+    <p:sldId id="266" r:id="rId10"/>
+    <p:sldId id="280" r:id="rId11"/>
+    <p:sldId id="260" r:id="rId12"/>
+    <p:sldId id="267" r:id="rId13"/>
+    <p:sldId id="268" r:id="rId14"/>
+    <p:sldId id="281" r:id="rId15"/>
+    <p:sldId id="282" r:id="rId16"/>
+    <p:sldId id="261" r:id="rId17"/>
+    <p:sldId id="262" r:id="rId18"/>
+    <p:sldId id="283" r:id="rId19"/>
+    <p:sldId id="270" r:id="rId20"/>
+    <p:sldId id="284" r:id="rId21"/>
+    <p:sldId id="269" r:id="rId22"/>
+    <p:sldId id="271" r:id="rId23"/>
+    <p:sldId id="272" r:id="rId24"/>
+    <p:sldId id="264" r:id="rId25"/>
+    <p:sldId id="265" r:id="rId26"/>
+    <p:sldId id="273" r:id="rId27"/>
+    <p:sldId id="274" r:id="rId28"/>
+    <p:sldId id="275" r:id="rId29"/>
+    <p:sldId id="276" r:id="rId30"/>
   </p:sldIdLst>
   <p:sldSz cx="9144000" cy="6858000" type="screen4x3"/>
   <p:notesSz cx="6858000" cy="9144000"/>
@@ -133,6 +133,22 @@
       </a:defRPr>
     </a:lvl9pPr>
   </p:defaultTextStyle>
+  <p:extLst>
+    <p:ext uri="{EFAFB233-063F-42B5-8137-9DF3F51BA10A}">
+      <p15:sldGuideLst xmlns:p15="http://schemas.microsoft.com/office/powerpoint/2012/main">
+        <p15:guide id="1" orient="horz" pos="2160" userDrawn="1">
+          <p15:clr>
+            <a:srgbClr val="A4A3A4"/>
+          </p15:clr>
+        </p15:guide>
+        <p15:guide id="2" pos="2880" userDrawn="1">
+          <p15:clr>
+            <a:srgbClr val="A4A3A4"/>
+          </p15:clr>
+        </p15:guide>
+      </p15:sldGuideLst>
+    </p:ext>
+  </p:extLst>
 </p:presentation>
 </file>
 
@@ -218,8 +234,6 @@
           <a:p>
             <a:fld id="{B6EAC958-4C72-4C65-A86C-4EE1B746A363}" type="datetimeFigureOut">
               <a:rPr lang="tr-TR" smtClean="0"/>
-              <a:pPr/>
-              <a:t>13.11.2020</a:t>
             </a:fld>
             <a:endParaRPr lang="tr-TR" dirty="0"/>
           </a:p>
@@ -288,6 +302,7 @@
               <a:rPr lang="tr-TR" smtClean="0"/>
               <a:t>Asıl metin stillerini düzenlemek için tıklatın</a:t>
             </a:r>
+            <a:endParaRPr lang="tr-TR" smtClean="0"/>
           </a:p>
           <a:p>
             <a:pPr lvl="1"/>
@@ -295,6 +310,7 @@
               <a:rPr lang="tr-TR" smtClean="0"/>
               <a:t>İkinci düzey</a:t>
             </a:r>
+            <a:endParaRPr lang="tr-TR" smtClean="0"/>
           </a:p>
           <a:p>
             <a:pPr lvl="2"/>
@@ -302,6 +318,7 @@
               <a:rPr lang="tr-TR" smtClean="0"/>
               <a:t>Üçüncü düzey</a:t>
             </a:r>
+            <a:endParaRPr lang="tr-TR" smtClean="0"/>
           </a:p>
           <a:p>
             <a:pPr lvl="3"/>
@@ -309,6 +326,7 @@
               <a:rPr lang="tr-TR" smtClean="0"/>
               <a:t>Dördüncü düzey</a:t>
             </a:r>
+            <a:endParaRPr lang="tr-TR" smtClean="0"/>
           </a:p>
           <a:p>
             <a:pPr lvl="4"/>
@@ -380,8 +398,6 @@
           <a:p>
             <a:fld id="{04E0DEA6-A866-4183-A5AE-883C5A0E72B2}" type="slidenum">
               <a:rPr lang="tr-TR" smtClean="0"/>
-              <a:pPr/>
-              <a:t>‹#›</a:t>
             </a:fld>
             <a:endParaRPr lang="tr-TR" dirty="0"/>
           </a:p>
@@ -552,8 +568,6 @@
           <a:p>
             <a:fld id="{04E0DEA6-A866-4183-A5AE-883C5A0E72B2}" type="slidenum">
               <a:rPr lang="tr-TR" smtClean="0"/>
-              <a:pPr/>
-              <a:t>1</a:t>
             </a:fld>
             <a:endParaRPr lang="tr-TR" dirty="0"/>
           </a:p>
@@ -596,7 +610,7 @@
             <a:spLocks noGrp="1"/>
           </p:cNvSpPr>
           <p:nvPr>
-            <p:ph type="ctrTitle"/>
+            <p:ph type="ctrTitle" hasCustomPrompt="1"/>
           </p:nvPr>
         </p:nvSpPr>
         <p:spPr>
@@ -669,7 +683,7 @@
             <a:spLocks noGrp="1"/>
           </p:cNvSpPr>
           <p:nvPr>
-            <p:ph type="subTitle" idx="1"/>
+            <p:ph type="subTitle" idx="1" hasCustomPrompt="1"/>
           </p:nvPr>
         </p:nvSpPr>
         <p:spPr>
@@ -740,8 +754,6 @@
           <a:p>
             <a:fld id="{409D55B9-E4B1-4FD8-A81F-BE20017B3190}" type="datetime1">
               <a:rPr lang="tr-TR" smtClean="0"/>
-              <a:pPr/>
-              <a:t>13.11.2020</a:t>
             </a:fld>
             <a:endParaRPr lang="tr-TR" dirty="0"/>
           </a:p>
@@ -783,8 +795,6 @@
           <a:p>
             <a:fld id="{B1DEFA8C-F947-479F-BE07-76B6B3F80BF1}" type="slidenum">
               <a:rPr lang="tr-TR" smtClean="0"/>
-              <a:pPr/>
-              <a:t>‹#›</a:t>
             </a:fld>
             <a:endParaRPr lang="tr-TR" dirty="0"/>
           </a:p>
@@ -822,7 +832,7 @@
             <a:spLocks noGrp="1"/>
           </p:cNvSpPr>
           <p:nvPr>
-            <p:ph type="title"/>
+            <p:ph type="title" hasCustomPrompt="1"/>
           </p:nvPr>
         </p:nvSpPr>
         <p:spPr/>
@@ -845,7 +855,7 @@
             <a:spLocks noGrp="1"/>
           </p:cNvSpPr>
           <p:nvPr>
-            <p:ph type="body" orient="vert" idx="1"/>
+            <p:ph type="body" orient="vert" idx="1" hasCustomPrompt="1"/>
           </p:nvPr>
         </p:nvSpPr>
         <p:spPr/>
@@ -858,6 +868,7 @@
               <a:rPr lang="tr-TR" smtClean="0"/>
               <a:t>Asıl metin stillerini düzenlemek için tıklatın</a:t>
             </a:r>
+            <a:endParaRPr lang="tr-TR" smtClean="0"/>
           </a:p>
           <a:p>
             <a:pPr lvl="1" eaLnBrk="1" latinLnBrk="0" hangingPunct="1"/>
@@ -865,6 +876,7 @@
               <a:rPr lang="tr-TR" smtClean="0"/>
               <a:t>İkinci düzey</a:t>
             </a:r>
+            <a:endParaRPr lang="tr-TR" smtClean="0"/>
           </a:p>
           <a:p>
             <a:pPr lvl="2" eaLnBrk="1" latinLnBrk="0" hangingPunct="1"/>
@@ -872,6 +884,7 @@
               <a:rPr lang="tr-TR" smtClean="0"/>
               <a:t>Üçüncü düzey</a:t>
             </a:r>
+            <a:endParaRPr lang="tr-TR" smtClean="0"/>
           </a:p>
           <a:p>
             <a:pPr lvl="3" eaLnBrk="1" latinLnBrk="0" hangingPunct="1"/>
@@ -879,6 +892,7 @@
               <a:rPr lang="tr-TR" smtClean="0"/>
               <a:t>Dördüncü düzey</a:t>
             </a:r>
+            <a:endParaRPr lang="tr-TR" smtClean="0"/>
           </a:p>
           <a:p>
             <a:pPr lvl="4" eaLnBrk="1" latinLnBrk="0" hangingPunct="1"/>
@@ -907,8 +921,6 @@
           <a:p>
             <a:fld id="{4001DC2B-B288-4705-A32D-3FB9B12BB379}" type="datetime1">
               <a:rPr lang="tr-TR" smtClean="0"/>
-              <a:pPr/>
-              <a:t>13.11.2020</a:t>
             </a:fld>
             <a:endParaRPr lang="tr-TR" dirty="0"/>
           </a:p>
@@ -950,8 +962,6 @@
           <a:p>
             <a:fld id="{B1DEFA8C-F947-479F-BE07-76B6B3F80BF1}" type="slidenum">
               <a:rPr lang="tr-TR" smtClean="0"/>
-              <a:pPr/>
-              <a:t>‹#›</a:t>
             </a:fld>
             <a:endParaRPr lang="tr-TR" dirty="0"/>
           </a:p>
@@ -989,7 +999,7 @@
             <a:spLocks noGrp="1"/>
           </p:cNvSpPr>
           <p:nvPr>
-            <p:ph type="title" orient="vert"/>
+            <p:ph type="title" orient="vert" hasCustomPrompt="1"/>
           </p:nvPr>
         </p:nvSpPr>
         <p:spPr>
@@ -1017,7 +1027,7 @@
             <a:spLocks noGrp="1"/>
           </p:cNvSpPr>
           <p:nvPr>
-            <p:ph type="body" orient="vert" idx="1"/>
+            <p:ph type="body" orient="vert" idx="1" hasCustomPrompt="1"/>
           </p:nvPr>
         </p:nvSpPr>
         <p:spPr>
@@ -1035,6 +1045,7 @@
               <a:rPr lang="tr-TR" smtClean="0"/>
               <a:t>Asıl metin stillerini düzenlemek için tıklatın</a:t>
             </a:r>
+            <a:endParaRPr lang="tr-TR" smtClean="0"/>
           </a:p>
           <a:p>
             <a:pPr lvl="1" eaLnBrk="1" latinLnBrk="0" hangingPunct="1"/>
@@ -1042,6 +1053,7 @@
               <a:rPr lang="tr-TR" smtClean="0"/>
               <a:t>İkinci düzey</a:t>
             </a:r>
+            <a:endParaRPr lang="tr-TR" smtClean="0"/>
           </a:p>
           <a:p>
             <a:pPr lvl="2" eaLnBrk="1" latinLnBrk="0" hangingPunct="1"/>
@@ -1049,6 +1061,7 @@
               <a:rPr lang="tr-TR" smtClean="0"/>
               <a:t>Üçüncü düzey</a:t>
             </a:r>
+            <a:endParaRPr lang="tr-TR" smtClean="0"/>
           </a:p>
           <a:p>
             <a:pPr lvl="3" eaLnBrk="1" latinLnBrk="0" hangingPunct="1"/>
@@ -1056,6 +1069,7 @@
               <a:rPr lang="tr-TR" smtClean="0"/>
               <a:t>Dördüncü düzey</a:t>
             </a:r>
+            <a:endParaRPr lang="tr-TR" smtClean="0"/>
           </a:p>
           <a:p>
             <a:pPr lvl="4" eaLnBrk="1" latinLnBrk="0" hangingPunct="1"/>
@@ -1084,8 +1098,6 @@
           <a:p>
             <a:fld id="{C900F4F1-03D0-4152-90E0-818381BA64E9}" type="datetime1">
               <a:rPr lang="tr-TR" smtClean="0"/>
-              <a:pPr/>
-              <a:t>13.11.2020</a:t>
             </a:fld>
             <a:endParaRPr lang="tr-TR" dirty="0"/>
           </a:p>
@@ -1127,8 +1139,6 @@
           <a:p>
             <a:fld id="{B1DEFA8C-F947-479F-BE07-76B6B3F80BF1}" type="slidenum">
               <a:rPr lang="tr-TR" smtClean="0"/>
-              <a:pPr/>
-              <a:t>‹#›</a:t>
             </a:fld>
             <a:endParaRPr lang="tr-TR" dirty="0"/>
           </a:p>
@@ -1166,7 +1176,7 @@
             <a:spLocks noGrp="1"/>
           </p:cNvSpPr>
           <p:nvPr>
-            <p:ph type="title"/>
+            <p:ph type="title" hasCustomPrompt="1"/>
           </p:nvPr>
         </p:nvSpPr>
         <p:spPr/>
@@ -1189,7 +1199,7 @@
             <a:spLocks noGrp="1"/>
           </p:cNvSpPr>
           <p:nvPr>
-            <p:ph idx="1"/>
+            <p:ph idx="1" hasCustomPrompt="1"/>
           </p:nvPr>
         </p:nvSpPr>
         <p:spPr/>
@@ -1202,6 +1212,7 @@
               <a:rPr lang="tr-TR" smtClean="0"/>
               <a:t>Asıl metin stillerini düzenlemek için tıklatın</a:t>
             </a:r>
+            <a:endParaRPr lang="tr-TR" smtClean="0"/>
           </a:p>
           <a:p>
             <a:pPr lvl="1" eaLnBrk="1" latinLnBrk="0" hangingPunct="1"/>
@@ -1209,6 +1220,7 @@
               <a:rPr lang="tr-TR" smtClean="0"/>
               <a:t>İkinci düzey</a:t>
             </a:r>
+            <a:endParaRPr lang="tr-TR" smtClean="0"/>
           </a:p>
           <a:p>
             <a:pPr lvl="2" eaLnBrk="1" latinLnBrk="0" hangingPunct="1"/>
@@ -1216,6 +1228,7 @@
               <a:rPr lang="tr-TR" smtClean="0"/>
               <a:t>Üçüncü düzey</a:t>
             </a:r>
+            <a:endParaRPr lang="tr-TR" smtClean="0"/>
           </a:p>
           <a:p>
             <a:pPr lvl="3" eaLnBrk="1" latinLnBrk="0" hangingPunct="1"/>
@@ -1223,6 +1236,7 @@
               <a:rPr lang="tr-TR" smtClean="0"/>
               <a:t>Dördüncü düzey</a:t>
             </a:r>
+            <a:endParaRPr lang="tr-TR" smtClean="0"/>
           </a:p>
           <a:p>
             <a:pPr lvl="4" eaLnBrk="1" latinLnBrk="0" hangingPunct="1"/>
@@ -1251,8 +1265,6 @@
           <a:p>
             <a:fld id="{5240C499-26DB-4020-B674-63EE610462BD}" type="datetime1">
               <a:rPr lang="tr-TR" smtClean="0"/>
-              <a:pPr/>
-              <a:t>13.11.2020</a:t>
             </a:fld>
             <a:endParaRPr lang="tr-TR" dirty="0"/>
           </a:p>
@@ -1294,8 +1306,6 @@
           <a:p>
             <a:fld id="{B1DEFA8C-F947-479F-BE07-76B6B3F80BF1}" type="slidenum">
               <a:rPr lang="tr-TR" smtClean="0"/>
-              <a:pPr/>
-              <a:t>‹#›</a:t>
             </a:fld>
             <a:endParaRPr lang="tr-TR" dirty="0"/>
           </a:p>
@@ -1338,7 +1348,7 @@
             <a:spLocks noGrp="1"/>
           </p:cNvSpPr>
           <p:nvPr>
-            <p:ph type="title"/>
+            <p:ph type="title" hasCustomPrompt="1"/>
           </p:nvPr>
         </p:nvSpPr>
         <p:spPr>
@@ -1408,7 +1418,7 @@
             <a:spLocks noGrp="1"/>
           </p:cNvSpPr>
           <p:nvPr>
-            <p:ph type="body" idx="1"/>
+            <p:ph type="body" idx="1" hasCustomPrompt="1"/>
           </p:nvPr>
         </p:nvSpPr>
         <p:spPr>
@@ -1475,6 +1485,7 @@
               <a:rPr kumimoji="0" lang="tr-TR" smtClean="0"/>
               <a:t>Asıl metin stillerini düzenlemek için tıklatın</a:t>
             </a:r>
+            <a:endParaRPr kumimoji="0" lang="tr-TR" smtClean="0"/>
           </a:p>
         </p:txBody>
       </p:sp>
@@ -1495,8 +1506,6 @@
           <a:p>
             <a:fld id="{606DE25E-9412-40B2-B135-AE233636D5EE}" type="datetime1">
               <a:rPr lang="tr-TR" smtClean="0"/>
-              <a:pPr/>
-              <a:t>13.11.2020</a:t>
             </a:fld>
             <a:endParaRPr lang="tr-TR" dirty="0"/>
           </a:p>
@@ -1538,8 +1547,6 @@
           <a:p>
             <a:fld id="{B1DEFA8C-F947-479F-BE07-76B6B3F80BF1}" type="slidenum">
               <a:rPr lang="tr-TR" smtClean="0"/>
-              <a:pPr/>
-              <a:t>‹#›</a:t>
             </a:fld>
             <a:endParaRPr lang="tr-TR" dirty="0"/>
           </a:p>
@@ -1577,7 +1584,7 @@
             <a:spLocks noGrp="1"/>
           </p:cNvSpPr>
           <p:nvPr>
-            <p:ph type="title"/>
+            <p:ph type="title" hasCustomPrompt="1"/>
           </p:nvPr>
         </p:nvSpPr>
         <p:spPr>
@@ -1605,7 +1612,7 @@
             <a:spLocks noGrp="1"/>
           </p:cNvSpPr>
           <p:nvPr>
-            <p:ph sz="half" idx="1"/>
+            <p:ph sz="half" idx="1" hasCustomPrompt="1"/>
           </p:nvPr>
         </p:nvSpPr>
         <p:spPr>
@@ -1639,6 +1646,7 @@
               <a:rPr lang="tr-TR" smtClean="0"/>
               <a:t>Asıl metin stillerini düzenlemek için tıklatın</a:t>
             </a:r>
+            <a:endParaRPr lang="tr-TR" smtClean="0"/>
           </a:p>
           <a:p>
             <a:pPr lvl="1" eaLnBrk="1" latinLnBrk="0" hangingPunct="1"/>
@@ -1646,6 +1654,7 @@
               <a:rPr lang="tr-TR" smtClean="0"/>
               <a:t>İkinci düzey</a:t>
             </a:r>
+            <a:endParaRPr lang="tr-TR" smtClean="0"/>
           </a:p>
           <a:p>
             <a:pPr lvl="2" eaLnBrk="1" latinLnBrk="0" hangingPunct="1"/>
@@ -1653,6 +1662,7 @@
               <a:rPr lang="tr-TR" smtClean="0"/>
               <a:t>Üçüncü düzey</a:t>
             </a:r>
+            <a:endParaRPr lang="tr-TR" smtClean="0"/>
           </a:p>
           <a:p>
             <a:pPr lvl="3" eaLnBrk="1" latinLnBrk="0" hangingPunct="1"/>
@@ -1660,6 +1670,7 @@
               <a:rPr lang="tr-TR" smtClean="0"/>
               <a:t>Dördüncü düzey</a:t>
             </a:r>
+            <a:endParaRPr lang="tr-TR" smtClean="0"/>
           </a:p>
           <a:p>
             <a:pPr lvl="4" eaLnBrk="1" latinLnBrk="0" hangingPunct="1"/>
@@ -1678,7 +1689,7 @@
             <a:spLocks noGrp="1"/>
           </p:cNvSpPr>
           <p:nvPr>
-            <p:ph sz="half" idx="2"/>
+            <p:ph sz="half" idx="2" hasCustomPrompt="1"/>
           </p:nvPr>
         </p:nvSpPr>
         <p:spPr>
@@ -1712,6 +1723,7 @@
               <a:rPr lang="tr-TR" smtClean="0"/>
               <a:t>Asıl metin stillerini düzenlemek için tıklatın</a:t>
             </a:r>
+            <a:endParaRPr lang="tr-TR" smtClean="0"/>
           </a:p>
           <a:p>
             <a:pPr lvl="1" eaLnBrk="1" latinLnBrk="0" hangingPunct="1"/>
@@ -1719,6 +1731,7 @@
               <a:rPr lang="tr-TR" smtClean="0"/>
               <a:t>İkinci düzey</a:t>
             </a:r>
+            <a:endParaRPr lang="tr-TR" smtClean="0"/>
           </a:p>
           <a:p>
             <a:pPr lvl="2" eaLnBrk="1" latinLnBrk="0" hangingPunct="1"/>
@@ -1726,6 +1739,7 @@
               <a:rPr lang="tr-TR" smtClean="0"/>
               <a:t>Üçüncü düzey</a:t>
             </a:r>
+            <a:endParaRPr lang="tr-TR" smtClean="0"/>
           </a:p>
           <a:p>
             <a:pPr lvl="3" eaLnBrk="1" latinLnBrk="0" hangingPunct="1"/>
@@ -1733,6 +1747,7 @@
               <a:rPr lang="tr-TR" smtClean="0"/>
               <a:t>Dördüncü düzey</a:t>
             </a:r>
+            <a:endParaRPr lang="tr-TR" smtClean="0"/>
           </a:p>
           <a:p>
             <a:pPr lvl="4" eaLnBrk="1" latinLnBrk="0" hangingPunct="1"/>
@@ -1761,8 +1776,6 @@
           <a:p>
             <a:fld id="{CBE73300-DC74-4978-B195-1AFD96E70A60}" type="datetime1">
               <a:rPr lang="tr-TR" smtClean="0"/>
-              <a:pPr/>
-              <a:t>13.11.2020</a:t>
             </a:fld>
             <a:endParaRPr lang="tr-TR" dirty="0"/>
           </a:p>
@@ -1804,8 +1817,6 @@
           <a:p>
             <a:fld id="{B1DEFA8C-F947-479F-BE07-76B6B3F80BF1}" type="slidenum">
               <a:rPr lang="tr-TR" smtClean="0"/>
-              <a:pPr/>
-              <a:t>‹#›</a:t>
             </a:fld>
             <a:endParaRPr lang="tr-TR" dirty="0"/>
           </a:p>
@@ -1843,7 +1854,7 @@
             <a:spLocks noGrp="1"/>
           </p:cNvSpPr>
           <p:nvPr>
-            <p:ph type="title"/>
+            <p:ph type="title" hasCustomPrompt="1"/>
           </p:nvPr>
         </p:nvSpPr>
         <p:spPr>
@@ -1875,7 +1886,7 @@
             <a:spLocks noGrp="1"/>
           </p:cNvSpPr>
           <p:nvPr>
-            <p:ph type="body" idx="1"/>
+            <p:ph type="body" idx="1" hasCustomPrompt="1"/>
           </p:nvPr>
         </p:nvSpPr>
         <p:spPr>
@@ -1921,6 +1932,7 @@
               <a:rPr kumimoji="0" lang="tr-TR" smtClean="0"/>
               <a:t>Asıl metin stillerini düzenlemek için tıklatın</a:t>
             </a:r>
+            <a:endParaRPr kumimoji="0" lang="tr-TR" smtClean="0"/>
           </a:p>
         </p:txBody>
       </p:sp>
@@ -1931,7 +1943,7 @@
             <a:spLocks noGrp="1"/>
           </p:cNvSpPr>
           <p:nvPr>
-            <p:ph type="body" sz="half" idx="3"/>
+            <p:ph type="body" sz="half" idx="3" hasCustomPrompt="1"/>
           </p:nvPr>
         </p:nvSpPr>
         <p:spPr>
@@ -1975,6 +1987,7 @@
               <a:rPr kumimoji="0" lang="tr-TR" smtClean="0"/>
               <a:t>Asıl metin stillerini düzenlemek için tıklatın</a:t>
             </a:r>
+            <a:endParaRPr kumimoji="0" lang="tr-TR" smtClean="0"/>
           </a:p>
         </p:txBody>
       </p:sp>
@@ -1985,7 +1998,7 @@
             <a:spLocks noGrp="1"/>
           </p:cNvSpPr>
           <p:nvPr>
-            <p:ph sz="quarter" idx="2"/>
+            <p:ph sz="quarter" idx="2" hasCustomPrompt="1"/>
           </p:nvPr>
         </p:nvSpPr>
         <p:spPr>
@@ -2019,6 +2032,7 @@
               <a:rPr lang="tr-TR" smtClean="0"/>
               <a:t>Asıl metin stillerini düzenlemek için tıklatın</a:t>
             </a:r>
+            <a:endParaRPr lang="tr-TR" smtClean="0"/>
           </a:p>
           <a:p>
             <a:pPr lvl="1" eaLnBrk="1" latinLnBrk="0" hangingPunct="1"/>
@@ -2026,6 +2040,7 @@
               <a:rPr lang="tr-TR" smtClean="0"/>
               <a:t>İkinci düzey</a:t>
             </a:r>
+            <a:endParaRPr lang="tr-TR" smtClean="0"/>
           </a:p>
           <a:p>
             <a:pPr lvl="2" eaLnBrk="1" latinLnBrk="0" hangingPunct="1"/>
@@ -2033,6 +2048,7 @@
               <a:rPr lang="tr-TR" smtClean="0"/>
               <a:t>Üçüncü düzey</a:t>
             </a:r>
+            <a:endParaRPr lang="tr-TR" smtClean="0"/>
           </a:p>
           <a:p>
             <a:pPr lvl="3" eaLnBrk="1" latinLnBrk="0" hangingPunct="1"/>
@@ -2040,6 +2056,7 @@
               <a:rPr lang="tr-TR" smtClean="0"/>
               <a:t>Dördüncü düzey</a:t>
             </a:r>
+            <a:endParaRPr lang="tr-TR" smtClean="0"/>
           </a:p>
           <a:p>
             <a:pPr lvl="4" eaLnBrk="1" latinLnBrk="0" hangingPunct="1"/>
@@ -2058,7 +2075,7 @@
             <a:spLocks noGrp="1"/>
           </p:cNvSpPr>
           <p:nvPr>
-            <p:ph sz="quarter" idx="4"/>
+            <p:ph sz="quarter" idx="4" hasCustomPrompt="1"/>
           </p:nvPr>
         </p:nvSpPr>
         <p:spPr>
@@ -2092,6 +2109,7 @@
               <a:rPr lang="tr-TR" smtClean="0"/>
               <a:t>Asıl metin stillerini düzenlemek için tıklatın</a:t>
             </a:r>
+            <a:endParaRPr lang="tr-TR" smtClean="0"/>
           </a:p>
           <a:p>
             <a:pPr lvl="1" eaLnBrk="1" latinLnBrk="0" hangingPunct="1"/>
@@ -2099,6 +2117,7 @@
               <a:rPr lang="tr-TR" smtClean="0"/>
               <a:t>İkinci düzey</a:t>
             </a:r>
+            <a:endParaRPr lang="tr-TR" smtClean="0"/>
           </a:p>
           <a:p>
             <a:pPr lvl="2" eaLnBrk="1" latinLnBrk="0" hangingPunct="1"/>
@@ -2106,6 +2125,7 @@
               <a:rPr lang="tr-TR" smtClean="0"/>
               <a:t>Üçüncü düzey</a:t>
             </a:r>
+            <a:endParaRPr lang="tr-TR" smtClean="0"/>
           </a:p>
           <a:p>
             <a:pPr lvl="3" eaLnBrk="1" latinLnBrk="0" hangingPunct="1"/>
@@ -2113,6 +2133,7 @@
               <a:rPr lang="tr-TR" smtClean="0"/>
               <a:t>Dördüncü düzey</a:t>
             </a:r>
+            <a:endParaRPr lang="tr-TR" smtClean="0"/>
           </a:p>
           <a:p>
             <a:pPr lvl="4" eaLnBrk="1" latinLnBrk="0" hangingPunct="1"/>
@@ -2141,8 +2162,6 @@
           <a:p>
             <a:fld id="{9BD7D7F9-D4EC-45A6-A0CF-5A0D496AED36}" type="datetime1">
               <a:rPr lang="tr-TR" smtClean="0"/>
-              <a:pPr/>
-              <a:t>13.11.2020</a:t>
             </a:fld>
             <a:endParaRPr lang="tr-TR" dirty="0"/>
           </a:p>
@@ -2184,8 +2203,6 @@
           <a:p>
             <a:fld id="{B1DEFA8C-F947-479F-BE07-76B6B3F80BF1}" type="slidenum">
               <a:rPr lang="tr-TR" smtClean="0"/>
-              <a:pPr/>
-              <a:t>‹#›</a:t>
             </a:fld>
             <a:endParaRPr lang="tr-TR" dirty="0"/>
           </a:p>
@@ -2223,7 +2240,7 @@
             <a:spLocks noGrp="1"/>
           </p:cNvSpPr>
           <p:nvPr>
-            <p:ph type="title"/>
+            <p:ph type="title" hasCustomPrompt="1"/>
           </p:nvPr>
         </p:nvSpPr>
         <p:spPr>
@@ -2293,8 +2310,6 @@
           <a:p>
             <a:fld id="{77860A16-B72A-4B5C-9902-F4E2D73E9CB4}" type="datetime1">
               <a:rPr lang="tr-TR" smtClean="0"/>
-              <a:pPr/>
-              <a:t>13.11.2020</a:t>
             </a:fld>
             <a:endParaRPr lang="tr-TR" dirty="0"/>
           </a:p>
@@ -2336,8 +2351,6 @@
           <a:p>
             <a:fld id="{B1DEFA8C-F947-479F-BE07-76B6B3F80BF1}" type="slidenum">
               <a:rPr lang="tr-TR" smtClean="0"/>
-              <a:pPr/>
-              <a:t>‹#›</a:t>
             </a:fld>
             <a:endParaRPr lang="tr-TR" dirty="0"/>
           </a:p>
@@ -2385,8 +2398,6 @@
           <a:p>
             <a:fld id="{C4F2E0F0-1D07-41F0-8C74-E5000B0990EC}" type="datetime1">
               <a:rPr lang="tr-TR" smtClean="0"/>
-              <a:pPr/>
-              <a:t>13.11.2020</a:t>
             </a:fld>
             <a:endParaRPr lang="tr-TR" dirty="0"/>
           </a:p>
@@ -2428,8 +2439,6 @@
           <a:p>
             <a:fld id="{B1DEFA8C-F947-479F-BE07-76B6B3F80BF1}" type="slidenum">
               <a:rPr lang="tr-TR" smtClean="0"/>
-              <a:pPr/>
-              <a:t>‹#›</a:t>
             </a:fld>
             <a:endParaRPr lang="tr-TR" dirty="0"/>
           </a:p>
@@ -2467,7 +2476,7 @@
             <a:spLocks noGrp="1"/>
           </p:cNvSpPr>
           <p:nvPr>
-            <p:ph type="title"/>
+            <p:ph type="title" hasCustomPrompt="1"/>
           </p:nvPr>
         </p:nvSpPr>
         <p:spPr>
@@ -2516,7 +2525,7 @@
             <a:spLocks noGrp="1"/>
           </p:cNvSpPr>
           <p:nvPr>
-            <p:ph type="body" idx="2"/>
+            <p:ph type="body" idx="2" hasCustomPrompt="1"/>
           </p:nvPr>
         </p:nvSpPr>
         <p:spPr>
@@ -2555,6 +2564,7 @@
               <a:rPr kumimoji="0" lang="tr-TR" smtClean="0"/>
               <a:t>Asıl metin stillerini düzenlemek için tıklatın</a:t>
             </a:r>
+            <a:endParaRPr kumimoji="0" lang="tr-TR" smtClean="0"/>
           </a:p>
         </p:txBody>
       </p:sp>
@@ -2565,7 +2575,7 @@
             <a:spLocks noGrp="1"/>
           </p:cNvSpPr>
           <p:nvPr>
-            <p:ph sz="half" idx="1"/>
+            <p:ph sz="half" idx="1" hasCustomPrompt="1"/>
           </p:nvPr>
         </p:nvSpPr>
         <p:spPr>
@@ -2599,6 +2609,7 @@
               <a:rPr lang="tr-TR" smtClean="0"/>
               <a:t>Asıl metin stillerini düzenlemek için tıklatın</a:t>
             </a:r>
+            <a:endParaRPr lang="tr-TR" smtClean="0"/>
           </a:p>
           <a:p>
             <a:pPr lvl="1" eaLnBrk="1" latinLnBrk="0" hangingPunct="1"/>
@@ -2606,6 +2617,7 @@
               <a:rPr lang="tr-TR" smtClean="0"/>
               <a:t>İkinci düzey</a:t>
             </a:r>
+            <a:endParaRPr lang="tr-TR" smtClean="0"/>
           </a:p>
           <a:p>
             <a:pPr lvl="2" eaLnBrk="1" latinLnBrk="0" hangingPunct="1"/>
@@ -2613,6 +2625,7 @@
               <a:rPr lang="tr-TR" smtClean="0"/>
               <a:t>Üçüncü düzey</a:t>
             </a:r>
+            <a:endParaRPr lang="tr-TR" smtClean="0"/>
           </a:p>
           <a:p>
             <a:pPr lvl="3" eaLnBrk="1" latinLnBrk="0" hangingPunct="1"/>
@@ -2620,6 +2633,7 @@
               <a:rPr lang="tr-TR" smtClean="0"/>
               <a:t>Dördüncü düzey</a:t>
             </a:r>
+            <a:endParaRPr lang="tr-TR" smtClean="0"/>
           </a:p>
           <a:p>
             <a:pPr lvl="4" eaLnBrk="1" latinLnBrk="0" hangingPunct="1"/>
@@ -2648,8 +2662,6 @@
           <a:p>
             <a:fld id="{E09F8AE0-FF6E-422D-A3C3-7186A7C609C8}" type="datetime1">
               <a:rPr lang="tr-TR" smtClean="0"/>
-              <a:pPr/>
-              <a:t>13.11.2020</a:t>
             </a:fld>
             <a:endParaRPr lang="tr-TR" dirty="0"/>
           </a:p>
@@ -2691,8 +2703,6 @@
           <a:p>
             <a:fld id="{B1DEFA8C-F947-479F-BE07-76B6B3F80BF1}" type="slidenum">
               <a:rPr lang="tr-TR" smtClean="0"/>
-              <a:pPr/>
-              <a:t>‹#›</a:t>
             </a:fld>
             <a:endParaRPr lang="tr-TR" dirty="0"/>
           </a:p>
@@ -2707,7 +2717,7 @@
 </file>
 
 <file path=ppt/slideLayouts/slideLayout9.xml><?xml version="1.0" encoding="utf-8"?>
-<p:sldLayout xmlns:a="http://schemas.openxmlformats.org/drawingml/2006/main" xmlns:r="http://schemas.openxmlformats.org/officeDocument/2006/relationships" xmlns:p="http://schemas.openxmlformats.org/presentationml/2006/main" showMasterSp="0" type="picTx" preserve="1">
+<p:sldLayout xmlns:a="http://schemas.openxmlformats.org/drawingml/2006/main" xmlns:r="http://schemas.openxmlformats.org/officeDocument/2006/relationships" xmlns:p="http://schemas.openxmlformats.org/presentationml/2006/main" type="picTx" preserve="1" showMasterSp="0">
   <p:cSld name="Başlıklı Resim">
     <p:spTree>
       <p:nvGrpSpPr>
@@ -2842,7 +2852,7 @@
             <a:spLocks noGrp="1"/>
           </p:cNvSpPr>
           <p:nvPr>
-            <p:ph type="title"/>
+            <p:ph type="title" hasCustomPrompt="1"/>
           </p:nvPr>
         </p:nvSpPr>
         <p:spPr>
@@ -2879,7 +2889,7 @@
             <a:spLocks noGrp="1"/>
           </p:cNvSpPr>
           <p:nvPr>
-            <p:ph type="body" sz="half" idx="2"/>
+            <p:ph type="body" sz="half" idx="2" hasCustomPrompt="1"/>
           </p:nvPr>
         </p:nvSpPr>
         <p:spPr>
@@ -2918,6 +2928,7 @@
               <a:rPr kumimoji="0" lang="tr-TR" smtClean="0"/>
               <a:t>Asıl metin stillerini düzenlemek için tıklatın</a:t>
             </a:r>
+            <a:endParaRPr kumimoji="0" lang="tr-TR" smtClean="0"/>
           </a:p>
         </p:txBody>
       </p:sp>
@@ -2938,8 +2949,6 @@
           <a:p>
             <a:fld id="{4B230745-8BA2-4AA0-BB87-784E5C88766F}" type="datetime1">
               <a:rPr lang="tr-TR" smtClean="0"/>
-              <a:pPr/>
-              <a:t>13.11.2020</a:t>
             </a:fld>
             <a:endParaRPr lang="tr-TR" dirty="0"/>
           </a:p>
@@ -2986,8 +2995,6 @@
           <a:p>
             <a:fld id="{B1DEFA8C-F947-479F-BE07-76B6B3F80BF1}" type="slidenum">
               <a:rPr lang="tr-TR" smtClean="0"/>
-              <a:pPr/>
-              <a:t>‹#›</a:t>
             </a:fld>
             <a:endParaRPr lang="tr-TR" dirty="0"/>
           </a:p>
@@ -3000,7 +3007,7 @@
             <a:spLocks noGrp="1"/>
           </p:cNvSpPr>
           <p:nvPr>
-            <p:ph type="pic" idx="1"/>
+            <p:ph type="pic" idx="1" hasCustomPrompt="1"/>
           </p:nvPr>
         </p:nvSpPr>
         <p:spPr>
@@ -3042,9 +3049,7 @@
       <p:sp>
         <p:nvSpPr>
           <p:cNvPr id="10" name="9 Serbest Form"/>
-          <p:cNvSpPr>
-            <a:spLocks/>
-          </p:cNvSpPr>
+          <p:cNvSpPr/>
           <p:nvPr/>
         </p:nvSpPr>
         <p:spPr bwMode="auto">
@@ -3185,9 +3190,7 @@
       <p:sp>
         <p:nvSpPr>
           <p:cNvPr id="11" name="10 Serbest Form"/>
-          <p:cNvSpPr>
-            <a:spLocks/>
-          </p:cNvSpPr>
+          <p:cNvSpPr/>
           <p:nvPr/>
         </p:nvSpPr>
         <p:spPr bwMode="auto">
@@ -3328,9 +3331,7 @@
       <p:sp>
         <p:nvSpPr>
           <p:cNvPr id="7" name="6 Serbest Form"/>
-          <p:cNvSpPr>
-            <a:spLocks/>
-          </p:cNvSpPr>
+          <p:cNvSpPr/>
           <p:nvPr/>
         </p:nvSpPr>
         <p:spPr bwMode="auto">
@@ -3471,9 +3472,7 @@
       <p:sp>
         <p:nvSpPr>
           <p:cNvPr id="8" name="7 Serbest Form"/>
-          <p:cNvSpPr>
-            <a:spLocks/>
-          </p:cNvSpPr>
+          <p:cNvSpPr/>
           <p:nvPr/>
         </p:nvSpPr>
         <p:spPr bwMode="auto">
@@ -3644,6 +3643,7 @@
               <a:rPr kumimoji="0" lang="tr-TR" smtClean="0"/>
               <a:t>Asıl metin stillerini düzenlemek için tıklatın</a:t>
             </a:r>
+            <a:endParaRPr kumimoji="0" lang="tr-TR" smtClean="0"/>
           </a:p>
           <a:p>
             <a:pPr lvl="1" eaLnBrk="1" latinLnBrk="0" hangingPunct="1"/>
@@ -3651,6 +3651,7 @@
               <a:rPr kumimoji="0" lang="tr-TR" smtClean="0"/>
               <a:t>İkinci düzey</a:t>
             </a:r>
+            <a:endParaRPr kumimoji="0" lang="tr-TR" smtClean="0"/>
           </a:p>
           <a:p>
             <a:pPr lvl="2" eaLnBrk="1" latinLnBrk="0" hangingPunct="1"/>
@@ -3658,6 +3659,7 @@
               <a:rPr kumimoji="0" lang="tr-TR" smtClean="0"/>
               <a:t>Üçüncü düzey</a:t>
             </a:r>
+            <a:endParaRPr kumimoji="0" lang="tr-TR" smtClean="0"/>
           </a:p>
           <a:p>
             <a:pPr lvl="3" eaLnBrk="1" latinLnBrk="0" hangingPunct="1"/>
@@ -3665,6 +3667,7 @@
               <a:rPr kumimoji="0" lang="tr-TR" smtClean="0"/>
               <a:t>Dördüncü düzey</a:t>
             </a:r>
+            <a:endParaRPr kumimoji="0" lang="tr-TR" smtClean="0"/>
           </a:p>
           <a:p>
             <a:pPr lvl="4" eaLnBrk="1" latinLnBrk="0" hangingPunct="1"/>
@@ -3711,8 +3714,6 @@
           <a:p>
             <a:fld id="{D39A2413-00BD-42BC-BA3E-C7E806641AE2}" type="datetime1">
               <a:rPr lang="tr-TR" smtClean="0"/>
-              <a:pPr/>
-              <a:t>13.11.2020</a:t>
             </a:fld>
             <a:endParaRPr lang="tr-TR" dirty="0"/>
           </a:p>
@@ -3790,8 +3791,6 @@
           <a:p>
             <a:fld id="{B1DEFA8C-F947-479F-BE07-76B6B3F80BF1}" type="slidenum">
               <a:rPr lang="tr-TR" smtClean="0"/>
-              <a:pPr/>
-              <a:t>‹#›</a:t>
             </a:fld>
             <a:endParaRPr lang="tr-TR" dirty="0"/>
           </a:p>
@@ -3814,9 +3813,7 @@
         <p:sp>
           <p:nvSpPr>
             <p:cNvPr id="12" name="11 Serbest Form"/>
-            <p:cNvSpPr>
-              <a:spLocks/>
-            </p:cNvSpPr>
+            <p:cNvSpPr/>
             <p:nvPr/>
           </p:nvSpPr>
           <p:spPr bwMode="auto">
@@ -3916,9 +3913,7 @@
         <p:sp>
           <p:nvSpPr>
             <p:cNvPr id="13" name="12 Serbest Form"/>
-            <p:cNvSpPr>
-              <a:spLocks/>
-            </p:cNvSpPr>
+            <p:cNvSpPr/>
             <p:nvPr/>
           </p:nvSpPr>
           <p:spPr bwMode="auto">
@@ -4015,17 +4010,17 @@
   </p:cSld>
   <p:clrMap bg1="lt1" tx1="dk1" bg2="lt2" tx2="dk2" accent1="accent1" accent2="accent2" accent3="accent3" accent4="accent4" accent5="accent5" accent6="accent6" hlink="hlink" folHlink="folHlink"/>
   <p:sldLayoutIdLst>
-    <p:sldLayoutId id="2147483733" r:id="rId1"/>
-    <p:sldLayoutId id="2147483734" r:id="rId2"/>
-    <p:sldLayoutId id="2147483735" r:id="rId3"/>
-    <p:sldLayoutId id="2147483736" r:id="rId4"/>
-    <p:sldLayoutId id="2147483737" r:id="rId5"/>
-    <p:sldLayoutId id="2147483738" r:id="rId6"/>
-    <p:sldLayoutId id="2147483739" r:id="rId7"/>
-    <p:sldLayoutId id="2147483740" r:id="rId8"/>
-    <p:sldLayoutId id="2147483741" r:id="rId9"/>
-    <p:sldLayoutId id="2147483742" r:id="rId10"/>
-    <p:sldLayoutId id="2147483743" r:id="rId11"/>
+    <p:sldLayoutId id="2147483649" r:id="rId1"/>
+    <p:sldLayoutId id="2147483650" r:id="rId2"/>
+    <p:sldLayoutId id="2147483651" r:id="rId3"/>
+    <p:sldLayoutId id="2147483652" r:id="rId4"/>
+    <p:sldLayoutId id="2147483653" r:id="rId5"/>
+    <p:sldLayoutId id="2147483654" r:id="rId6"/>
+    <p:sldLayoutId id="2147483655" r:id="rId7"/>
+    <p:sldLayoutId id="2147483656" r:id="rId8"/>
+    <p:sldLayoutId id="2147483657" r:id="rId9"/>
+    <p:sldLayoutId id="2147483658" r:id="rId10"/>
+    <p:sldLayoutId id="2147483659" r:id="rId11"/>
   </p:sldLayoutIdLst>
   <p:hf hdr="0" ftr="0" dt="0"/>
   <p:txStyles>
@@ -4058,7 +4053,7 @@
           <a:schemeClr val="accent3"/>
         </a:buClr>
         <a:buSzPct val="95000"/>
-        <a:buFont typeface="Wingdings 2"/>
+        <a:buFont typeface="Wingdings 2" panose="05020102010507070707"/>
         <a:buChar char=""/>
         <a:defRPr kumimoji="0" sz="2600" kern="1200">
           <a:solidFill>
@@ -4069,7 +4064,7 @@
           <a:cs typeface="+mn-cs"/>
         </a:defRPr>
       </a:lvl1pPr>
-      <a:lvl2pPr marL="640080" indent="-246888" algn="l" rtl="0" eaLnBrk="1" latinLnBrk="0" hangingPunct="1">
+      <a:lvl2pPr marL="640080" indent="-247015" algn="l" rtl="0" eaLnBrk="1" latinLnBrk="0" hangingPunct="1">
         <a:spcBef>
           <a:spcPct val="20000"/>
         </a:spcBef>
@@ -4077,7 +4072,7 @@
           <a:schemeClr val="accent1"/>
         </a:buClr>
         <a:buSzPct val="85000"/>
-        <a:buFont typeface="Wingdings 2"/>
+        <a:buFont typeface="Wingdings 2" panose="05020102010507070707"/>
         <a:buChar char=""/>
         <a:defRPr kumimoji="0" sz="2400" kern="1200">
           <a:solidFill>
@@ -4088,7 +4083,7 @@
           <a:cs typeface="+mn-cs"/>
         </a:defRPr>
       </a:lvl2pPr>
-      <a:lvl3pPr marL="914400" indent="-246888" algn="l" rtl="0" eaLnBrk="1" latinLnBrk="0" hangingPunct="1">
+      <a:lvl3pPr marL="914400" indent="-247015" algn="l" rtl="0" eaLnBrk="1" latinLnBrk="0" hangingPunct="1">
         <a:spcBef>
           <a:spcPct val="20000"/>
         </a:spcBef>
@@ -4096,7 +4091,7 @@
           <a:schemeClr val="accent2"/>
         </a:buClr>
         <a:buSzPct val="70000"/>
-        <a:buFont typeface="Wingdings 2"/>
+        <a:buFont typeface="Wingdings 2" panose="05020102010507070707"/>
         <a:buChar char=""/>
         <a:defRPr kumimoji="0" sz="2100" kern="1200">
           <a:solidFill>
@@ -4107,7 +4102,7 @@
           <a:cs typeface="+mn-cs"/>
         </a:defRPr>
       </a:lvl3pPr>
-      <a:lvl4pPr marL="1188720" indent="-210312" algn="l" rtl="0" eaLnBrk="1" latinLnBrk="0" hangingPunct="1">
+      <a:lvl4pPr marL="1188720" indent="-210185" algn="l" rtl="0" eaLnBrk="1" latinLnBrk="0" hangingPunct="1">
         <a:spcBef>
           <a:spcPct val="20000"/>
         </a:spcBef>
@@ -4115,7 +4110,7 @@
           <a:schemeClr val="accent3"/>
         </a:buClr>
         <a:buSzPct val="65000"/>
-        <a:buFont typeface="Wingdings 2"/>
+        <a:buFont typeface="Wingdings 2" panose="05020102010507070707"/>
         <a:buChar char=""/>
         <a:defRPr kumimoji="0" sz="2000" kern="1200">
           <a:solidFill>
@@ -4126,7 +4121,7 @@
           <a:cs typeface="+mn-cs"/>
         </a:defRPr>
       </a:lvl4pPr>
-      <a:lvl5pPr marL="1463040" indent="-210312" algn="l" rtl="0" eaLnBrk="1" latinLnBrk="0" hangingPunct="1">
+      <a:lvl5pPr marL="1463040" indent="-210185" algn="l" rtl="0" eaLnBrk="1" latinLnBrk="0" hangingPunct="1">
         <a:spcBef>
           <a:spcPct val="20000"/>
         </a:spcBef>
@@ -4134,7 +4129,7 @@
           <a:schemeClr val="accent4"/>
         </a:buClr>
         <a:buSzPct val="65000"/>
-        <a:buFont typeface="Wingdings 2"/>
+        <a:buFont typeface="Wingdings 2" panose="05020102010507070707"/>
         <a:buChar char=""/>
         <a:defRPr kumimoji="0" sz="2000" kern="1200">
           <a:solidFill>
@@ -4145,7 +4140,7 @@
           <a:cs typeface="+mn-cs"/>
         </a:defRPr>
       </a:lvl5pPr>
-      <a:lvl6pPr marL="1737360" indent="-210312" algn="l" rtl="0" eaLnBrk="1" latinLnBrk="0" hangingPunct="1">
+      <a:lvl6pPr marL="1737360" indent="-210185" algn="l" rtl="0" eaLnBrk="1" latinLnBrk="0" hangingPunct="1">
         <a:spcBef>
           <a:spcPct val="20000"/>
         </a:spcBef>
@@ -4153,7 +4148,7 @@
           <a:schemeClr val="accent5"/>
         </a:buClr>
         <a:buSzPct val="80000"/>
-        <a:buFont typeface="Wingdings 2"/>
+        <a:buFont typeface="Wingdings 2" panose="05020102010507070707"/>
         <a:buChar char=""/>
         <a:defRPr kumimoji="0" sz="1800" kern="1200">
           <a:solidFill>
@@ -4172,7 +4167,7 @@
           <a:schemeClr val="accent6"/>
         </a:buClr>
         <a:buSzPct val="80000"/>
-        <a:buFont typeface="Wingdings 2"/>
+        <a:buFont typeface="Wingdings 2" panose="05020102010507070707"/>
         <a:buChar char=""/>
         <a:defRPr kumimoji="0" sz="1600" kern="1200" baseline="0">
           <a:solidFill>
@@ -4393,7 +4388,7 @@
           <a:lstStyle/>
           <a:p>
             <a:pPr>
-              <a:buFont typeface="Arial" pitchFamily="34" charset="0"/>
+              <a:buFont typeface="Arial" panose="020B0704020202020204" pitchFamily="34" charset="0"/>
               <a:buChar char="•"/>
             </a:pPr>
             <a:r>
@@ -4404,10 +4399,15 @@
               </a:rPr>
               <a:t>Inheritance</a:t>
             </a:r>
+            <a:endParaRPr lang="de-DE" sz="2800" dirty="0" smtClean="0">
+              <a:solidFill>
+                <a:schemeClr val="bg1"/>
+              </a:solidFill>
+            </a:endParaRPr>
           </a:p>
           <a:p>
             <a:pPr>
-              <a:buFont typeface="Arial" pitchFamily="34" charset="0"/>
+              <a:buFont typeface="Arial" panose="020B0704020202020204" pitchFamily="34" charset="0"/>
               <a:buChar char="•"/>
             </a:pPr>
             <a:endParaRPr lang="de-DE" sz="2800" dirty="0" smtClean="0">
@@ -4418,7 +4418,7 @@
           </a:p>
           <a:p>
             <a:pPr>
-              <a:buFont typeface="Arial" pitchFamily="34" charset="0"/>
+              <a:buFont typeface="Arial" panose="020B0704020202020204" pitchFamily="34" charset="0"/>
               <a:buChar char="•"/>
             </a:pPr>
             <a:r>
@@ -4437,7 +4437,7 @@
           </a:p>
           <a:p>
             <a:pPr>
-              <a:buFont typeface="Arial" pitchFamily="34" charset="0"/>
+              <a:buFont typeface="Arial" panose="020B0704020202020204" pitchFamily="34" charset="0"/>
               <a:buChar char="•"/>
             </a:pPr>
             <a:endParaRPr lang="de-DE" sz="2800" dirty="0" smtClean="0">
@@ -4448,7 +4448,7 @@
           </a:p>
           <a:p>
             <a:pPr>
-              <a:buFont typeface="Arial" pitchFamily="34" charset="0"/>
+              <a:buFont typeface="Arial" panose="020B0704020202020204" pitchFamily="34" charset="0"/>
               <a:buChar char="•"/>
             </a:pPr>
             <a:r>
@@ -4459,10 +4459,15 @@
               </a:rPr>
               <a:t>Encapculation</a:t>
             </a:r>
+            <a:endParaRPr lang="de-DE" sz="2800" dirty="0" smtClean="0">
+              <a:solidFill>
+                <a:schemeClr val="bg1"/>
+              </a:solidFill>
+            </a:endParaRPr>
           </a:p>
           <a:p>
             <a:pPr>
-              <a:buFont typeface="Arial" pitchFamily="34" charset="0"/>
+              <a:buFont typeface="Arial" panose="020B0704020202020204" pitchFamily="34" charset="0"/>
               <a:buChar char="•"/>
             </a:pPr>
             <a:endParaRPr lang="de-DE" sz="2800" dirty="0" smtClean="0">
@@ -4473,7 +4478,7 @@
           </a:p>
           <a:p>
             <a:pPr>
-              <a:buFont typeface="Arial" pitchFamily="34" charset="0"/>
+              <a:buFont typeface="Arial" panose="020B0704020202020204" pitchFamily="34" charset="0"/>
               <a:buChar char="•"/>
             </a:pPr>
             <a:r>
@@ -4484,8 +4489,6 @@
               </a:rPr>
               <a:t>Abstract</a:t>
             </a:r>
-          </a:p>
-          <a:p>
             <a:endParaRPr lang="de-DE" sz="2800" dirty="0" smtClean="0">
               <a:solidFill>
                 <a:schemeClr val="bg1"/>
@@ -4493,6 +4496,13 @@
             </a:endParaRPr>
           </a:p>
           <a:p>
+            <a:endParaRPr lang="de-DE" sz="2800" dirty="0" smtClean="0">
+              <a:solidFill>
+                <a:schemeClr val="bg1"/>
+              </a:solidFill>
+            </a:endParaRPr>
+          </a:p>
+          <a:p>
             <a:endParaRPr lang="de-DE" sz="2800" dirty="0" smtClean="0"/>
           </a:p>
           <a:p>
@@ -4517,8 +4527,6 @@
           <a:p>
             <a:fld id="{B1DEFA8C-F947-479F-BE07-76B6B3F80BF1}" type="slidenum">
               <a:rPr lang="tr-TR" smtClean="0"/>
-              <a:pPr/>
-              <a:t>1</a:t>
             </a:fld>
             <a:endParaRPr lang="tr-TR" dirty="0"/>
           </a:p>
@@ -4566,8 +4574,6 @@
           <a:p>
             <a:fld id="{B1DEFA8C-F947-479F-BE07-76B6B3F80BF1}" type="slidenum">
               <a:rPr lang="tr-TR" smtClean="0"/>
-              <a:pPr/>
-              <a:t>10</a:t>
             </a:fld>
             <a:endParaRPr lang="tr-TR" dirty="0"/>
           </a:p>
@@ -4877,6 +4883,11 @@
               </a:rPr>
               <a:t> etme veya tamir etmede </a:t>
             </a:r>
+            <a:endParaRPr lang="tr-TR" sz="2000" dirty="0" smtClean="0">
+              <a:solidFill>
+                <a:schemeClr val="bg1"/>
+              </a:solidFill>
+            </a:endParaRPr>
           </a:p>
           <a:p>
             <a:r>
@@ -4919,6 +4930,11 @@
               </a:rPr>
               <a:t>.</a:t>
             </a:r>
+            <a:endParaRPr lang="tr-TR" sz="2000" dirty="0" smtClean="0">
+              <a:solidFill>
+                <a:schemeClr val="bg1"/>
+              </a:solidFill>
+            </a:endParaRPr>
           </a:p>
           <a:p>
             <a:r>
@@ -4993,6 +5009,11 @@
               </a:rPr>
               <a:t>. </a:t>
             </a:r>
+            <a:endParaRPr lang="tr-TR" sz="2000" dirty="0" smtClean="0">
+              <a:solidFill>
+                <a:schemeClr val="bg1"/>
+              </a:solidFill>
+            </a:endParaRPr>
           </a:p>
           <a:p>
             <a:endParaRPr lang="tr-TR" sz="2000" dirty="0">
@@ -5045,8 +5066,6 @@
           <a:p>
             <a:fld id="{B1DEFA8C-F947-479F-BE07-76B6B3F80BF1}" type="slidenum">
               <a:rPr lang="tr-TR" smtClean="0"/>
-              <a:pPr/>
-              <a:t>11</a:t>
             </a:fld>
             <a:endParaRPr lang="tr-TR" dirty="0"/>
           </a:p>
@@ -5097,6 +5116,11 @@
               </a:rPr>
               <a:t> edebilir.</a:t>
             </a:r>
+            <a:endParaRPr lang="tr-TR" sz="2000" dirty="0" smtClean="0">
+              <a:solidFill>
+                <a:schemeClr val="bg1"/>
+              </a:solidFill>
+            </a:endParaRPr>
           </a:p>
           <a:p>
             <a:r>
@@ -5123,6 +5147,11 @@
               </a:rPr>
               <a:t> sadece bir tane parent'i olabilir.</a:t>
             </a:r>
+            <a:endParaRPr lang="tr-TR" sz="2000" dirty="0" smtClean="0">
+              <a:solidFill>
+                <a:schemeClr val="bg1"/>
+              </a:solidFill>
+            </a:endParaRPr>
           </a:p>
           <a:p>
             <a:r>
@@ -5243,8 +5272,6 @@
           <a:p>
             <a:fld id="{B1DEFA8C-F947-479F-BE07-76B6B3F80BF1}" type="slidenum">
               <a:rPr lang="tr-TR" smtClean="0"/>
-              <a:pPr/>
-              <a:t>12</a:t>
             </a:fld>
             <a:endParaRPr lang="tr-TR" dirty="0"/>
           </a:p>
@@ -5259,7 +5286,7 @@
           <p:nvPr/>
         </p:nvPicPr>
         <p:blipFill>
-          <a:blip r:embed="rId2"/>
+          <a:blip r:embed="rId1"/>
           <a:stretch>
             <a:fillRect/>
           </a:stretch>
@@ -5316,8 +5343,6 @@
           <a:p>
             <a:fld id="{B1DEFA8C-F947-479F-BE07-76B6B3F80BF1}" type="slidenum">
               <a:rPr lang="tr-TR" smtClean="0"/>
-              <a:pPr/>
-              <a:t>13</a:t>
             </a:fld>
             <a:endParaRPr lang="tr-TR" dirty="0"/>
           </a:p>
@@ -5332,7 +5357,7 @@
           <p:nvPr/>
         </p:nvPicPr>
         <p:blipFill>
-          <a:blip r:embed="rId2"/>
+          <a:blip r:embed="rId1"/>
           <a:stretch>
             <a:fillRect/>
           </a:stretch>
@@ -5505,8 +5530,6 @@
           <a:p>
             <a:fld id="{B1DEFA8C-F947-479F-BE07-76B6B3F80BF1}" type="slidenum">
               <a:rPr lang="tr-TR" smtClean="0"/>
-              <a:pPr/>
-              <a:t>14</a:t>
             </a:fld>
             <a:endParaRPr lang="tr-TR" dirty="0"/>
           </a:p>
@@ -5554,8 +5577,6 @@
           <a:p>
             <a:fld id="{B1DEFA8C-F947-479F-BE07-76B6B3F80BF1}" type="slidenum">
               <a:rPr lang="tr-TR" smtClean="0"/>
-              <a:pPr/>
-              <a:t>15</a:t>
             </a:fld>
             <a:endParaRPr lang="tr-TR" dirty="0"/>
           </a:p>
@@ -5592,6 +5613,11 @@
               </a:rPr>
               <a:t>Overriding</a:t>
             </a:r>
+            <a:endParaRPr lang="de-DE" sz="2000" b="1" dirty="0" smtClean="0">
+              <a:solidFill>
+                <a:schemeClr val="bg1"/>
+              </a:solidFill>
+            </a:endParaRPr>
           </a:p>
           <a:p>
             <a:pPr algn="ctr"/>
@@ -5660,8 +5686,6 @@
           <a:p>
             <a:fld id="{B1DEFA8C-F947-479F-BE07-76B6B3F80BF1}" type="slidenum">
               <a:rPr lang="tr-TR" smtClean="0"/>
-              <a:pPr/>
-              <a:t>16</a:t>
             </a:fld>
             <a:endParaRPr lang="tr-TR" dirty="0"/>
           </a:p>
@@ -5676,7 +5700,7 @@
           <p:nvPr/>
         </p:nvPicPr>
         <p:blipFill>
-          <a:blip r:embed="rId2"/>
+          <a:blip r:embed="rId1"/>
           <a:stretch>
             <a:fillRect/>
           </a:stretch>
@@ -5733,8 +5757,6 @@
           <a:p>
             <a:fld id="{B1DEFA8C-F947-479F-BE07-76B6B3F80BF1}" type="slidenum">
               <a:rPr lang="tr-TR" smtClean="0"/>
-              <a:pPr/>
-              <a:t>17</a:t>
             </a:fld>
             <a:endParaRPr lang="tr-TR" dirty="0"/>
           </a:p>
@@ -5770,6 +5792,11 @@
               </a:rPr>
               <a:t>Overloading</a:t>
             </a:r>
+            <a:endParaRPr lang="de-DE" sz="2000" b="1" dirty="0" smtClean="0">
+              <a:solidFill>
+                <a:schemeClr val="bg1"/>
+              </a:solidFill>
+            </a:endParaRPr>
           </a:p>
           <a:p>
             <a:endParaRPr lang="de-DE" sz="2000" dirty="0" smtClean="0">
@@ -5852,8 +5879,6 @@
           <a:p>
             <a:fld id="{B1DEFA8C-F947-479F-BE07-76B6B3F80BF1}" type="slidenum">
               <a:rPr lang="tr-TR" smtClean="0"/>
-              <a:pPr/>
-              <a:t>18</a:t>
             </a:fld>
             <a:endParaRPr lang="tr-TR" dirty="0"/>
           </a:p>
@@ -5868,7 +5893,7 @@
           <p:nvPr/>
         </p:nvPicPr>
         <p:blipFill>
-          <a:blip r:embed="rId2"/>
+          <a:blip r:embed="rId1"/>
           <a:stretch>
             <a:fillRect/>
           </a:stretch>
@@ -5925,8 +5950,6 @@
           <a:p>
             <a:fld id="{B1DEFA8C-F947-479F-BE07-76B6B3F80BF1}" type="slidenum">
               <a:rPr lang="tr-TR" smtClean="0"/>
-              <a:pPr/>
-              <a:t>19</a:t>
             </a:fld>
             <a:endParaRPr lang="tr-TR" dirty="0"/>
           </a:p>
@@ -5954,7 +5977,7 @@
           <a:lstStyle/>
           <a:p>
             <a:pPr>
-              <a:buFont typeface="Arial" pitchFamily="34" charset="0"/>
+              <a:buFont typeface="Arial" panose="020B0704020202020204" pitchFamily="34" charset="0"/>
               <a:buChar char="•"/>
             </a:pPr>
             <a:r>
@@ -5973,7 +5996,7 @@
           </a:p>
           <a:p>
             <a:pPr>
-              <a:buFont typeface="Arial" pitchFamily="34" charset="0"/>
+              <a:buFont typeface="Arial" panose="020B0704020202020204" pitchFamily="34" charset="0"/>
               <a:buChar char="•"/>
             </a:pPr>
             <a:endParaRPr lang="tr-TR" sz="2000" dirty="0" smtClean="0">
@@ -5984,7 +6007,7 @@
           </a:p>
           <a:p>
             <a:pPr>
-              <a:buFont typeface="Arial" pitchFamily="34" charset="0"/>
+              <a:buFont typeface="Arial" panose="020B0704020202020204" pitchFamily="34" charset="0"/>
               <a:buChar char="•"/>
             </a:pPr>
             <a:r>
@@ -6011,7 +6034,7 @@
           </a:p>
           <a:p>
             <a:pPr>
-              <a:buFont typeface="Arial" pitchFamily="34" charset="0"/>
+              <a:buFont typeface="Arial" panose="020B0704020202020204" pitchFamily="34" charset="0"/>
               <a:buChar char="•"/>
             </a:pPr>
             <a:endParaRPr lang="tr-TR" sz="2000" dirty="0" smtClean="0">
@@ -6022,7 +6045,7 @@
           </a:p>
           <a:p>
             <a:pPr>
-              <a:buFont typeface="Arial" pitchFamily="34" charset="0"/>
+              <a:buFont typeface="Arial" panose="020B0704020202020204" pitchFamily="34" charset="0"/>
               <a:buChar char="•"/>
             </a:pPr>
             <a:r>
@@ -6049,7 +6072,7 @@
           </a:p>
           <a:p>
             <a:pPr>
-              <a:buFont typeface="Arial" pitchFamily="34" charset="0"/>
+              <a:buFont typeface="Arial" panose="020B0704020202020204" pitchFamily="34" charset="0"/>
               <a:buChar char="•"/>
             </a:pPr>
             <a:endParaRPr lang="tr-TR" sz="2000" dirty="0" smtClean="0">
@@ -6060,7 +6083,7 @@
           </a:p>
           <a:p>
             <a:pPr>
-              <a:buFont typeface="Arial" pitchFamily="34" charset="0"/>
+              <a:buFont typeface="Arial" panose="020B0704020202020204" pitchFamily="34" charset="0"/>
               <a:buChar char="•"/>
             </a:pPr>
             <a:r>
@@ -6079,7 +6102,7 @@
           </a:p>
           <a:p>
             <a:pPr>
-              <a:buFont typeface="Arial" pitchFamily="34" charset="0"/>
+              <a:buFont typeface="Arial" panose="020B0704020202020204" pitchFamily="34" charset="0"/>
               <a:buChar char="•"/>
             </a:pPr>
             <a:endParaRPr lang="tr-TR" sz="2000" dirty="0" smtClean="0">
@@ -6090,7 +6113,7 @@
           </a:p>
           <a:p>
             <a:pPr>
-              <a:buFont typeface="Arial" pitchFamily="34" charset="0"/>
+              <a:buFont typeface="Arial" panose="020B0704020202020204" pitchFamily="34" charset="0"/>
               <a:buChar char="•"/>
             </a:pPr>
             <a:r>
@@ -6151,8 +6174,6 @@
           <a:p>
             <a:fld id="{B1DEFA8C-F947-479F-BE07-76B6B3F80BF1}" type="slidenum">
               <a:rPr lang="tr-TR" smtClean="0"/>
-              <a:pPr/>
-              <a:t>2</a:t>
             </a:fld>
             <a:endParaRPr lang="tr-TR" dirty="0"/>
           </a:p>
@@ -6167,7 +6188,7 @@
           <p:nvPr/>
         </p:nvPicPr>
         <p:blipFill>
-          <a:blip r:embed="rId2"/>
+          <a:blip r:embed="rId1"/>
           <a:stretch>
             <a:fillRect/>
           </a:stretch>
@@ -6224,8 +6245,6 @@
           <a:p>
             <a:fld id="{B1DEFA8C-F947-479F-BE07-76B6B3F80BF1}" type="slidenum">
               <a:rPr lang="tr-TR" smtClean="0"/>
-              <a:pPr/>
-              <a:t>20</a:t>
             </a:fld>
             <a:endParaRPr lang="tr-TR" dirty="0"/>
           </a:p>
@@ -6261,6 +6280,11 @@
               </a:rPr>
               <a:t>Abstract</a:t>
             </a:r>
+            <a:endParaRPr lang="de-DE" sz="2000" b="1" dirty="0" smtClean="0">
+              <a:solidFill>
+                <a:schemeClr val="bg1"/>
+              </a:solidFill>
+            </a:endParaRPr>
           </a:p>
           <a:p>
             <a:pPr algn="ctr"/>
@@ -6272,7 +6296,7 @@
           </a:p>
           <a:p>
             <a:pPr>
-              <a:buFont typeface="Arial" pitchFamily="34" charset="0"/>
+              <a:buFont typeface="Arial" panose="020B0704020202020204" pitchFamily="34" charset="0"/>
               <a:buChar char="•"/>
             </a:pPr>
             <a:r>
@@ -6298,7 +6322,7 @@
           </a:p>
           <a:p>
             <a:pPr>
-              <a:buFont typeface="Arial" pitchFamily="34" charset="0"/>
+              <a:buFont typeface="Arial" panose="020B0704020202020204" pitchFamily="34" charset="0"/>
               <a:buChar char="•"/>
             </a:pPr>
             <a:r>
@@ -6324,7 +6348,7 @@
           </a:p>
           <a:p>
             <a:pPr>
-              <a:buFont typeface="Arial" pitchFamily="34" charset="0"/>
+              <a:buFont typeface="Arial" panose="020B0704020202020204" pitchFamily="34" charset="0"/>
               <a:buChar char="•"/>
             </a:pPr>
             <a:r>
@@ -6421,8 +6445,6 @@
           <a:p>
             <a:fld id="{B1DEFA8C-F947-479F-BE07-76B6B3F80BF1}" type="slidenum">
               <a:rPr lang="tr-TR" smtClean="0"/>
-              <a:pPr/>
-              <a:t>21</a:t>
             </a:fld>
             <a:endParaRPr lang="tr-TR" dirty="0"/>
           </a:p>
@@ -6583,6 +6605,11 @@
               </a:rPr>
               <a:t>olamazlar</a:t>
             </a:r>
+            <a:endParaRPr lang="tr-TR" dirty="0" smtClean="0">
+              <a:solidFill>
+                <a:schemeClr val="bg1"/>
+              </a:solidFill>
+            </a:endParaRPr>
           </a:p>
           <a:p>
             <a:endParaRPr lang="de-DE" dirty="0" smtClean="0">
@@ -6649,8 +6676,6 @@
           <a:p>
             <a:fld id="{B1DEFA8C-F947-479F-BE07-76B6B3F80BF1}" type="slidenum">
               <a:rPr lang="tr-TR" smtClean="0"/>
-              <a:pPr/>
-              <a:t>22</a:t>
             </a:fld>
             <a:endParaRPr lang="tr-TR" dirty="0"/>
           </a:p>
@@ -6739,6 +6764,11 @@
               </a:rPr>
               <a:t> interface'ler sadece abstract method icerebilir.  Bu yuzden interface kullanimi "full abstraction" olarak adlandirilir. Abstract class kulanimina   "partial abstraction" denir.</a:t>
             </a:r>
+            <a:endParaRPr lang="tr-TR" sz="2000" dirty="0" smtClean="0">
+              <a:solidFill>
+                <a:schemeClr val="bg1"/>
+              </a:solidFill>
+            </a:endParaRPr>
           </a:p>
           <a:p>
             <a:endParaRPr lang="tr-TR" sz="2000" b="1" dirty="0">
@@ -6791,8 +6821,6 @@
           <a:p>
             <a:fld id="{B1DEFA8C-F947-479F-BE07-76B6B3F80BF1}" type="slidenum">
               <a:rPr lang="tr-TR" smtClean="0"/>
-              <a:pPr/>
-              <a:t>23</a:t>
             </a:fld>
             <a:endParaRPr lang="tr-TR" dirty="0"/>
           </a:p>
@@ -6823,6 +6851,7 @@
               <a:rPr lang="tr-TR" dirty="0" smtClean="0"/>
               <a:t>interface'lerdeki method'larin access modifierlari default olarak "public" olur, </a:t>
             </a:r>
+            <a:endParaRPr lang="tr-TR" dirty="0" smtClean="0"/>
           </a:p>
           <a:p>
             <a:r>
@@ -6849,6 +6878,7 @@
               <a:rPr lang="de-DE" dirty="0" smtClean="0"/>
               <a:t>Interface de birden fazla parent olabilir,ama abstract ta bir tanedir.</a:t>
             </a:r>
+            <a:endParaRPr lang="de-DE" dirty="0" smtClean="0"/>
           </a:p>
           <a:p>
             <a:endParaRPr lang="de-DE" dirty="0" smtClean="0"/>
@@ -6878,6 +6908,7 @@
               <a:rPr lang="de-DE" dirty="0" smtClean="0"/>
               <a:t>.</a:t>
             </a:r>
+            <a:endParaRPr lang="de-DE" dirty="0" smtClean="0"/>
           </a:p>
           <a:p>
             <a:endParaRPr lang="de-DE" dirty="0" smtClean="0"/>
@@ -6912,6 +6943,7 @@
               <a:rPr lang="de-DE" dirty="0" smtClean="0"/>
               <a:t>Bodyli method olusturabilmek icin default ve static kelimelerini kullanmaliyiz.Ama child class larin override etme zorunlulugu yoktur.</a:t>
             </a:r>
+            <a:endParaRPr lang="de-DE" dirty="0" smtClean="0"/>
           </a:p>
           <a:p>
             <a:endParaRPr lang="de-DE" dirty="0" smtClean="0"/>
@@ -7037,8 +7069,6 @@
           <a:p>
             <a:fld id="{B1DEFA8C-F947-479F-BE07-76B6B3F80BF1}" type="slidenum">
               <a:rPr lang="tr-TR" smtClean="0"/>
-              <a:pPr/>
-              <a:t>24</a:t>
             </a:fld>
             <a:endParaRPr lang="tr-TR" dirty="0"/>
           </a:p>
@@ -7086,8 +7116,6 @@
           <a:p>
             <a:fld id="{B1DEFA8C-F947-479F-BE07-76B6B3F80BF1}" type="slidenum">
               <a:rPr lang="tr-TR" smtClean="0"/>
-              <a:pPr/>
-              <a:t>25</a:t>
             </a:fld>
             <a:endParaRPr lang="tr-TR" dirty="0"/>
           </a:p>
@@ -7135,8 +7163,6 @@
           <a:p>
             <a:fld id="{B1DEFA8C-F947-479F-BE07-76B6B3F80BF1}" type="slidenum">
               <a:rPr lang="tr-TR" smtClean="0"/>
-              <a:pPr/>
-              <a:t>26</a:t>
             </a:fld>
             <a:endParaRPr lang="tr-TR" dirty="0"/>
           </a:p>
@@ -7184,8 +7210,6 @@
           <a:p>
             <a:fld id="{B1DEFA8C-F947-479F-BE07-76B6B3F80BF1}" type="slidenum">
               <a:rPr lang="tr-TR" smtClean="0"/>
-              <a:pPr/>
-              <a:t>27</a:t>
             </a:fld>
             <a:endParaRPr lang="tr-TR" dirty="0"/>
           </a:p>
@@ -7233,8 +7257,6 @@
           <a:p>
             <a:fld id="{B1DEFA8C-F947-479F-BE07-76B6B3F80BF1}" type="slidenum">
               <a:rPr lang="tr-TR" smtClean="0"/>
-              <a:pPr/>
-              <a:t>3</a:t>
             </a:fld>
             <a:endParaRPr lang="tr-TR" dirty="0"/>
           </a:p>
@@ -7678,8 +7700,6 @@
           <a:p>
             <a:fld id="{B1DEFA8C-F947-479F-BE07-76B6B3F80BF1}" type="slidenum">
               <a:rPr lang="tr-TR" smtClean="0"/>
-              <a:pPr/>
-              <a:t>4</a:t>
             </a:fld>
             <a:endParaRPr lang="tr-TR" dirty="0"/>
           </a:p>
@@ -7727,8 +7747,6 @@
           <a:p>
             <a:fld id="{B1DEFA8C-F947-479F-BE07-76B6B3F80BF1}" type="slidenum">
               <a:rPr lang="tr-TR" smtClean="0"/>
-              <a:pPr/>
-              <a:t>5</a:t>
             </a:fld>
             <a:endParaRPr lang="tr-TR" dirty="0"/>
           </a:p>
@@ -7743,7 +7761,7 @@
           <p:nvPr/>
         </p:nvPicPr>
         <p:blipFill>
-          <a:blip r:embed="rId2"/>
+          <a:blip r:embed="rId1"/>
           <a:stretch>
             <a:fillRect/>
           </a:stretch>
@@ -8009,8 +8027,6 @@
           <a:p>
             <a:fld id="{B1DEFA8C-F947-479F-BE07-76B6B3F80BF1}" type="slidenum">
               <a:rPr lang="tr-TR" smtClean="0"/>
-              <a:pPr/>
-              <a:t>6</a:t>
             </a:fld>
             <a:endParaRPr lang="tr-TR" dirty="0"/>
           </a:p>
@@ -8058,8 +8074,6 @@
           <a:p>
             <a:fld id="{B1DEFA8C-F947-479F-BE07-76B6B3F80BF1}" type="slidenum">
               <a:rPr lang="tr-TR" smtClean="0"/>
-              <a:pPr/>
-              <a:t>7</a:t>
             </a:fld>
             <a:endParaRPr lang="tr-TR" dirty="0"/>
           </a:p>
@@ -8164,8 +8178,6 @@
               </a:rPr>
               <a:t>=“Ali“;</a:t>
             </a:r>
-          </a:p>
-          <a:p>
             <a:endParaRPr lang="de-DE" sz="2000" b="1" dirty="0" smtClean="0">
               <a:solidFill>
                 <a:schemeClr val="bg1"/>
@@ -8180,6 +8192,13 @@
             </a:endParaRPr>
           </a:p>
           <a:p>
+            <a:endParaRPr lang="de-DE" sz="2000" b="1" dirty="0" smtClean="0">
+              <a:solidFill>
+                <a:schemeClr val="bg1"/>
+              </a:solidFill>
+            </a:endParaRPr>
+          </a:p>
+          <a:p>
             <a:r>
               <a:rPr lang="tr-TR" sz="2000" b="1" dirty="0" smtClean="0">
                 <a:solidFill>
@@ -8220,6 +8239,11 @@
               </a:rPr>
               <a:t>() {</a:t>
             </a:r>
+            <a:endParaRPr lang="tr-TR" sz="2000" b="1" dirty="0" smtClean="0">
+              <a:solidFill>
+                <a:schemeClr val="bg1"/>
+              </a:solidFill>
+            </a:endParaRPr>
           </a:p>
           <a:p>
             <a:r>
@@ -8238,6 +8262,11 @@
               </a:rPr>
               <a:t> return isim;</a:t>
             </a:r>
+            <a:endParaRPr lang="tr-TR" sz="2000" b="1" dirty="0" smtClean="0">
+              <a:solidFill>
+                <a:schemeClr val="bg1"/>
+              </a:solidFill>
+            </a:endParaRPr>
           </a:p>
           <a:p>
             <a:r>
@@ -8332,6 +8361,11 @@
               </a:rPr>
               <a:t> isim) {</a:t>
             </a:r>
+            <a:endParaRPr lang="tr-TR" sz="2000" b="1" dirty="0" smtClean="0">
+              <a:solidFill>
+                <a:schemeClr val="bg1"/>
+              </a:solidFill>
+            </a:endParaRPr>
           </a:p>
           <a:p>
             <a:r>
@@ -8358,6 +8392,11 @@
               </a:rPr>
               <a:t>.isim = isim;</a:t>
             </a:r>
+            <a:endParaRPr lang="tr-TR" sz="2000" b="1" dirty="0" smtClean="0">
+              <a:solidFill>
+                <a:schemeClr val="bg1"/>
+              </a:solidFill>
+            </a:endParaRPr>
           </a:p>
           <a:p>
             <a:r>
@@ -8368,6 +8407,11 @@
               </a:rPr>
               <a:t>	  }</a:t>
             </a:r>
+            <a:endParaRPr lang="tr-TR" sz="2000" b="1" dirty="0" smtClean="0">
+              <a:solidFill>
+                <a:schemeClr val="bg1"/>
+              </a:solidFill>
+            </a:endParaRPr>
           </a:p>
           <a:p>
             <a:endParaRPr lang="tr-TR" dirty="0" smtClean="0"/>
@@ -8419,8 +8463,6 @@
           <a:p>
             <a:fld id="{B1DEFA8C-F947-479F-BE07-76B6B3F80BF1}" type="slidenum">
               <a:rPr lang="tr-TR" smtClean="0"/>
-              <a:pPr/>
-              <a:t>8</a:t>
             </a:fld>
             <a:endParaRPr lang="tr-TR" dirty="0"/>
           </a:p>
@@ -8435,7 +8477,7 @@
           <p:nvPr/>
         </p:nvPicPr>
         <p:blipFill>
-          <a:blip r:embed="rId2"/>
+          <a:blip r:embed="rId1"/>
           <a:stretch>
             <a:fillRect/>
           </a:stretch>
@@ -8505,6 +8547,11 @@
               </a:rPr>
               <a:t>INHERITANCE</a:t>
             </a:r>
+            <a:endParaRPr lang="de-DE" sz="2000" b="1" dirty="0" smtClean="0">
+              <a:solidFill>
+                <a:schemeClr val="bg1"/>
+              </a:solidFill>
+            </a:endParaRPr>
           </a:p>
           <a:p>
             <a:endParaRPr lang="de-DE" sz="2000" dirty="0" smtClean="0">
@@ -8671,8 +8718,6 @@
           <a:p>
             <a:fld id="{B1DEFA8C-F947-479F-BE07-76B6B3F80BF1}" type="slidenum">
               <a:rPr lang="tr-TR" smtClean="0"/>
-              <a:pPr/>
-              <a:t>9</a:t>
             </a:fld>
             <a:endParaRPr lang="tr-TR" dirty="0"/>
           </a:p>
@@ -8976,8 +9021,11 @@
       </a:bgFillStyleLst>
     </a:fmtScheme>
   </a:themeElements>
-  <a:objectDefaults/>
-  <a:extraClrSchemeLst/>
+  <a:extLst>
+    <a:ext uri="{05A4C25C-085E-4340-85A3-A5531E510DB2}">
+      <thm15:themeFamily xmlns:thm15="http://schemas.microsoft.com/office/thememl/2012/main" name="Office Theme" id="{62F939B6-93AF-4DB8-9C6B-D6C7DFDC589F}" vid="{4A3C46E8-61CC-4603-A589-7422A47A8E4A}"/>
+    </a:ext>
+  </a:extLst>
 </a:theme>
 </file>
 
@@ -9259,7 +9307,10 @@
       </a:bgFillStyleLst>
     </a:fmtScheme>
   </a:themeElements>
-  <a:objectDefaults/>
-  <a:extraClrSchemeLst/>
+  <a:extLst>
+    <a:ext uri="{05A4C25C-085E-4340-85A3-A5531E510DB2}">
+      <thm15:themeFamily xmlns:thm15="http://schemas.microsoft.com/office/thememl/2012/main" name="Office Theme" id="{62F939B6-93AF-4DB8-9C6B-D6C7DFDC589F}" vid="{4A3C46E8-61CC-4603-A589-7422A47A8E4A}"/>
+    </a:ext>
+  </a:extLst>
 </a:theme>
 </file>